--- a/docs/briefing-deck.pptx
+++ b/docs/briefing-deck.pptx
@@ -3121,7 +3121,7 @@
                 <a:ea typeface="Microsoft YaHei"/>
                 <a:cs typeface="Microsoft YaHei"/>
               </a:rPr>
-              <a:t>INFINITY-PARSER2 vs AZURE DOCUMENT INTELLIGENCE · 技术评估简报 · 2026-09-23</a:t>
+              <a:t>INFINITY-PARSER2 vs AZURE DOCUMENT INTELLIGENCE · 技术评估简报 · 2026-09-24</a:t>
             </a:r>
           </a:p>
         </p:txBody>
@@ -3365,7 +3365,7 @@
                 <a:ea typeface="Microsoft YaHei"/>
                 <a:cs typeface="Microsoft YaHei"/>
               </a:rPr>
-              <a:t>港股披露文件和 A 股公告可以进入 POC，其中金额类断言两边都没有失败。但 A 股年报、中报里</a:t>
+              <a:t>统一标点后，</a:t>
             </a:r>
             <a:r>
               <a:rPr sz="1300" b="1">
@@ -3376,7 +3376,7 @@
                 <a:ea typeface="Microsoft YaHei"/>
                 <a:cs typeface="Microsoft YaHei"/>
               </a:rPr>
-              <a:t>「页首是上一页续表」的页</a:t>
+              <a:t>解析质量上 Azure 每项都持平或更好</a:t>
             </a:r>
             <a:r>
               <a:rPr sz="1300" b="0">
@@ -3387,7 +3387,7 @@
                 <a:ea typeface="Microsoft YaHei"/>
                 <a:cs typeface="Microsoft YaHei"/>
               </a:rPr>
-              <a:t>，Infinity 会</a:t>
+              <a:t>。港股披露文件、A 股公告的关键字段没看到差异，可以进 POC；但 A 股年报、中报「页首是续表」的页，Infinity 会</a:t>
             </a:r>
             <a:r>
               <a:rPr sz="1300" b="1">
@@ -3409,7 +3409,7 @@
                 <a:ea typeface="Microsoft YaHei"/>
                 <a:cs typeface="Microsoft YaHei"/>
               </a:rPr>
-              <a:t>，没有任何报错；同样的页上 Azure 完整保留。它也</a:t>
+              <a:t>。它还</a:t>
             </a:r>
             <a:r>
               <a:rPr sz="1300" b="1">
@@ -3431,7 +3431,29 @@
                 <a:ea typeface="Microsoft YaHei"/>
                 <a:cs typeface="Microsoft YaHei"/>
               </a:rPr>
-              <a:t>，没法只把可疑字段送去人工复核。</a:t>
+              <a:t>、</a:t>
+            </a:r>
+            <a:r>
+              <a:rPr sz="1300" b="1">
+                <a:solidFill>
+                  <a:srgbClr val="1B2430"/>
+                </a:solidFill>
+                <a:latin typeface="Microsoft YaHei"/>
+                <a:ea typeface="Microsoft YaHei"/>
+                <a:cs typeface="Microsoft YaHei"/>
+              </a:rPr>
+              <a:t>只收 PDF 和图片</a:t>
+            </a:r>
+            <a:r>
+              <a:rPr sz="1300" b="0">
+                <a:solidFill>
+                  <a:srgbClr val="1B2430"/>
+                </a:solidFill>
+                <a:latin typeface="Microsoft YaHei"/>
+                <a:ea typeface="Microsoft YaHei"/>
+                <a:cs typeface="Microsoft YaHei"/>
+              </a:rPr>
+              <a:t>。替代理由只能来自成本或私有化部署。</a:t>
             </a:r>
           </a:p>
         </p:txBody>
@@ -4468,7 +4490,7 @@
                           <a:ea typeface="Microsoft YaHei"/>
                           <a:cs typeface="Microsoft YaHei"/>
                         </a:rPr>
-                        <a:t>金额与科目归属断言两边都没有失败；正文完整性：未观察到显著差异</a:t>
+                        <a:t>金额、科目归属断言两边都没有失败；分族的正文完整性待第三轮</a:t>
                       </a:r>
                     </a:p>
                   </a:txBody>
@@ -4590,7 +4612,7 @@
                           <a:ea typeface="Microsoft YaHei"/>
                           <a:cs typeface="Microsoft YaHei"/>
                         </a:rPr>
-                        <a:t>金额断言两边都没有失败；正文完整性 Infinity 通过更多（差距尚未排除标点差异）</a:t>
+                        <a:t>金额断言两边都没有失败；第一轮 Infinity 的领先已查明是标点造成的</a:t>
                       </a:r>
                     </a:p>
                   </a:txBody>
@@ -4712,7 +4734,7 @@
                           <a:ea typeface="Microsoft YaHei"/>
                           <a:cs typeface="Microsoft YaHei"/>
                         </a:rPr>
-                        <a:t>3 页确定性丢表（共 27 个金额），都发生在页首续表；Azure 在配对的 2 页上完整保留</a:t>
+                        <a:t>Infinity 3 页确定性丢表（共 27 个金额），都在页首续表页，没有报错；Azure 也缺了 6 个，原因待查</a:t>
                       </a:r>
                     </a:p>
                   </a:txBody>
@@ -5316,7 +5338,7 @@
                 <a:ea typeface="Microsoft YaHei"/>
                 <a:cs typeface="Microsoft YaHei"/>
               </a:rPr>
-              <a:t>金额 Azure 更稳，正文完整性 Infinity 领先（待确认）</a:t>
+              <a:t>统一标点后，Azure 在各项指标上持平或更好</a:t>
             </a:r>
           </a:p>
         </p:txBody>
@@ -6142,7 +6164,7 @@
                 <a:ea typeface="Microsoft YaHei"/>
                 <a:cs typeface="Microsoft YaHei"/>
               </a:rPr>
-              <a:t>金额与科目同行</a:t>
+              <a:t>正文完整性（统一标点后）</a:t>
             </a:r>
             <a:r>
               <a:rPr sz="1150" b="0">
@@ -6153,7 +6175,7 @@
                 <a:ea typeface="Microsoft YaHei"/>
                 <a:cs typeface="Microsoft YaHei"/>
               </a:rPr>
-              <a:t>  · 数字有没有挂错行 · 人工确认 · n = 76</a:t>
+              <a:t>  · 每页抽 3 行正文，查是否原样输出 · n = 448</a:t>
             </a:r>
           </a:p>
         </p:txBody>
@@ -6247,7 +6269,7 @@
         <p:spPr>
           <a:xfrm>
             <a:off x="1783080" y="3630168"/>
-            <a:ext cx="3931920" cy="155448"/>
+            <a:ext cx="3660617" cy="155448"/>
           </a:xfrm>
           <a:prstGeom prst="rect">
             <a:avLst/>
@@ -6313,7 +6335,7 @@
                 <a:ea typeface="Microsoft YaHei"/>
                 <a:cs typeface="Microsoft YaHei"/>
               </a:rPr>
-              <a:t>100%</a:t>
+              <a:t>93.1%</a:t>
             </a:r>
           </a:p>
         </p:txBody>
@@ -6407,7 +6429,7 @@
         <p:spPr>
           <a:xfrm>
             <a:off x="1783080" y="3941064"/>
-            <a:ext cx="3880805" cy="155448"/>
+            <a:ext cx="3817894" cy="155448"/>
           </a:xfrm>
           <a:prstGeom prst="rect">
             <a:avLst/>
@@ -6473,7 +6495,7 @@
                 <a:ea typeface="Microsoft YaHei"/>
                 <a:cs typeface="Microsoft YaHei"/>
               </a:rPr>
-              <a:t>98.7%</a:t>
+              <a:t>97.1%</a:t>
             </a:r>
           </a:p>
         </p:txBody>
@@ -6509,7 +6531,29 @@
                 <a:ea typeface="Microsoft YaHei"/>
                 <a:cs typeface="Microsoft YaHei"/>
               </a:rPr>
-              <a:t>未观察到显著差异（1 : 0）</a:t>
+              <a:t>差异显著（2 : 20，p = 0.0001）。</a:t>
+            </a:r>
+            <a:r>
+              <a:rPr sz="1000" b="1">
+                <a:solidFill>
+                  <a:srgbClr val="1B2430"/>
+                </a:solidFill>
+                <a:latin typeface="Microsoft YaHei"/>
+                <a:ea typeface="Microsoft YaHei"/>
+                <a:cs typeface="Microsoft YaHei"/>
+              </a:rPr>
+              <a:t>第一轮的 91.3% 对 72.5% 作废</a:t>
+            </a:r>
+            <a:r>
+              <a:rPr sz="1000" b="0">
+                <a:solidFill>
+                  <a:srgbClr val="5B6675"/>
+                </a:solidFill>
+                <a:latin typeface="Microsoft YaHei"/>
+                <a:ea typeface="Microsoft YaHei"/>
+                <a:cs typeface="Microsoft YaHei"/>
+              </a:rPr>
+              <a:t>：那是 Azure 把全角标点转成半角造成的。</a:t>
             </a:r>
           </a:p>
         </p:txBody>
@@ -6593,7 +6637,7 @@
                 <a:ea typeface="Microsoft YaHei"/>
                 <a:cs typeface="Microsoft YaHei"/>
               </a:rPr>
-              <a:t>正文完整性</a:t>
+              <a:t>单位与币种（统一标点后）</a:t>
             </a:r>
             <a:r>
               <a:rPr sz="1150" b="0">
@@ -6604,7 +6648,7 @@
                 <a:ea typeface="Microsoft YaHei"/>
                 <a:cs typeface="Microsoft YaHei"/>
               </a:rPr>
-              <a:t>  · 每页抽 3 行正文，查是否原样输出 · n = 448</a:t>
+              <a:t>  · 表头「单位：元」等是否保留 · n = 93</a:t>
             </a:r>
           </a:p>
         </p:txBody>
@@ -6698,7 +6742,7 @@
         <p:spPr>
           <a:xfrm>
             <a:off x="1783080" y="5321808"/>
-            <a:ext cx="3589842" cy="155448"/>
+            <a:ext cx="3888668" cy="155448"/>
           </a:xfrm>
           <a:prstGeom prst="rect">
             <a:avLst/>
@@ -6764,7 +6808,7 @@
                 <a:ea typeface="Microsoft YaHei"/>
                 <a:cs typeface="Microsoft YaHei"/>
               </a:rPr>
-              <a:t>91.3%</a:t>
+              <a:t>98.9%</a:t>
             </a:r>
           </a:p>
         </p:txBody>
@@ -6858,7 +6902,7 @@
         <p:spPr>
           <a:xfrm>
             <a:off x="1783080" y="5632704"/>
-            <a:ext cx="2850642" cy="155448"/>
+            <a:ext cx="3931920" cy="155448"/>
           </a:xfrm>
           <a:prstGeom prst="rect">
             <a:avLst/>
@@ -6924,7 +6968,7 @@
                 <a:ea typeface="Microsoft YaHei"/>
                 <a:cs typeface="Microsoft YaHei"/>
               </a:rPr>
-              <a:t>72.5%</a:t>
+              <a:t>100%</a:t>
             </a:r>
           </a:p>
         </p:txBody>
@@ -6960,29 +7004,7 @@
                 <a:ea typeface="Microsoft YaHei"/>
                 <a:cs typeface="Microsoft YaHei"/>
               </a:rPr>
-              <a:t>差异显著（99 : 15），但比对时没有统一全角/半角标点，</a:t>
-            </a:r>
-            <a:r>
-              <a:rPr sz="1000" b="1">
-                <a:solidFill>
-                  <a:srgbClr val="1B2430"/>
-                </a:solidFill>
-                <a:latin typeface="Microsoft YaHei"/>
-                <a:ea typeface="Microsoft YaHei"/>
-                <a:cs typeface="Microsoft YaHei"/>
-              </a:rPr>
-              <a:t>差距可能部分来自标点，不能读成「Azure 丢内容」</a:t>
-            </a:r>
-            <a:r>
-              <a:rPr sz="1000" b="0">
-                <a:solidFill>
-                  <a:srgbClr val="5B6675"/>
-                </a:solidFill>
-                <a:latin typeface="Microsoft YaHei"/>
-                <a:ea typeface="Microsoft YaHei"/>
-                <a:cs typeface="Microsoft YaHei"/>
-              </a:rPr>
-              <a:t>。正在复判。</a:t>
+              <a:t>未观察到显著差异（0 : 1）。金额与科目同行（n = 76）：Infinity 100%，Azure 98.7%，同样未观察到显著差异。</a:t>
             </a:r>
           </a:p>
         </p:txBody>
@@ -7066,7 +7088,7 @@
                 <a:ea typeface="Microsoft YaHei"/>
                 <a:cs typeface="Microsoft YaHei"/>
               </a:rPr>
-              <a:t>最要紧的发现：静默丢表</a:t>
+              <a:t>全量金额扫描：两边都会缺，性质不同</a:t>
             </a:r>
           </a:p>
         </p:txBody>
@@ -7079,8 +7101,44 @@
         </p:nvSpPr>
         <p:spPr>
           <a:xfrm>
-            <a:off x="7178040" y="1517904"/>
-            <a:ext cx="1417320" cy="457200"/>
+            <a:off x="7178040" y="1481328"/>
+            <a:ext cx="4327855" cy="228600"/>
+          </a:xfrm>
+          <a:prstGeom prst="rect">
+            <a:avLst/>
+          </a:prstGeom>
+          <a:noFill/>
+        </p:spPr>
+        <p:txBody>
+          <a:bodyPr wrap="square" lIns="0" rIns="0" tIns="18288" bIns="18288" anchor="t">
+            <a:spAutoFit/>
+          </a:bodyPr>
+          <a:lstStyle/>
+          <a:p>
+            <a:r>
+              <a:rPr sz="950" b="0">
+                <a:solidFill>
+                  <a:srgbClr val="5B6675"/>
+                </a:solidFill>
+                <a:latin typeface="Microsoft YaHei"/>
+                <a:ea typeface="Microsoft YaHei"/>
+                <a:cs typeface="Microsoft YaHei"/>
+              </a:rPr>
+              <a:t>配对 54 页 A 股金额页，1,544 个金额</a:t>
+            </a:r>
+          </a:p>
+        </p:txBody>
+      </p:sp>
+      <p:sp>
+        <p:nvSpPr>
+          <p:cNvPr id="47" name="TextBox 46"/>
+          <p:cNvSpPr txBox="1"/>
+          <p:nvPr/>
+        </p:nvSpPr>
+        <p:spPr>
+          <a:xfrm>
+            <a:off x="7178040" y="1691640"/>
+            <a:ext cx="1737360" cy="457200"/>
           </a:xfrm>
           <a:prstGeom prst="rect">
             <a:avLst/>
@@ -7102,21 +7160,21 @@
                 <a:ea typeface="Microsoft YaHei"/>
                 <a:cs typeface="Microsoft YaHei"/>
               </a:rPr>
-              <a:t>3 页</a:t>
-            </a:r>
-          </a:p>
-        </p:txBody>
-      </p:sp>
-      <p:sp>
-        <p:nvSpPr>
-          <p:cNvPr id="47" name="TextBox 46"/>
+              <a:t>11 个</a:t>
+            </a:r>
+          </a:p>
+        </p:txBody>
+      </p:sp>
+      <p:sp>
+        <p:nvSpPr>
+          <p:cNvPr id="48" name="TextBox 47"/>
           <p:cNvSpPr txBox="1"/>
           <p:nvPr/>
         </p:nvSpPr>
         <p:spPr>
           <a:xfrm>
-            <a:off x="7178040" y="2011680"/>
-            <a:ext cx="1417320" cy="411480"/>
+            <a:off x="7178040" y="2176272"/>
+            <a:ext cx="1737360" cy="274320"/>
           </a:xfrm>
           <a:prstGeom prst="rect">
             <a:avLst/>
@@ -7138,21 +7196,21 @@
                 <a:ea typeface="Microsoft YaHei"/>
                 <a:cs typeface="Microsoft YaHei"/>
               </a:rPr>
-              <a:t>73 页 A 股金额页中</a:t>
-            </a:r>
-          </a:p>
-        </p:txBody>
-      </p:sp>
-      <p:sp>
-        <p:nvSpPr>
-          <p:cNvPr id="48" name="TextBox 47"/>
+              <a:t>Infinity 缺失 · 2 页</a:t>
+            </a:r>
+          </a:p>
+        </p:txBody>
+      </p:sp>
+      <p:sp>
+        <p:nvSpPr>
+          <p:cNvPr id="49" name="TextBox 48"/>
           <p:cNvSpPr txBox="1"/>
           <p:nvPr/>
         </p:nvSpPr>
         <p:spPr>
           <a:xfrm>
-            <a:off x="8641080" y="1517904"/>
-            <a:ext cx="1417320" cy="457200"/>
+            <a:off x="9006840" y="1691640"/>
+            <a:ext cx="1737360" cy="457200"/>
           </a:xfrm>
           <a:prstGeom prst="rect">
             <a:avLst/>
@@ -7168,27 +7226,27 @@
             <a:r>
               <a:rPr sz="2800" b="1">
                 <a:solidFill>
-                  <a:srgbClr val="B3261E"/>
+                  <a:srgbClr val="1B2430"/>
                 </a:solidFill>
                 <a:latin typeface="Microsoft YaHei"/>
                 <a:ea typeface="Microsoft YaHei"/>
                 <a:cs typeface="Microsoft YaHei"/>
               </a:rPr>
-              <a:t>27 个</a:t>
-            </a:r>
-          </a:p>
-        </p:txBody>
-      </p:sp>
-      <p:sp>
-        <p:nvSpPr>
-          <p:cNvPr id="49" name="TextBox 48"/>
+              <a:t>6 个</a:t>
+            </a:r>
+          </a:p>
+        </p:txBody>
+      </p:sp>
+      <p:sp>
+        <p:nvSpPr>
+          <p:cNvPr id="50" name="TextBox 49"/>
           <p:cNvSpPr txBox="1"/>
           <p:nvPr/>
         </p:nvSpPr>
         <p:spPr>
           <a:xfrm>
-            <a:off x="8641080" y="2011680"/>
-            <a:ext cx="1417320" cy="411480"/>
+            <a:off x="9006840" y="2176272"/>
+            <a:ext cx="1737360" cy="274320"/>
           </a:xfrm>
           <a:prstGeom prst="rect">
             <a:avLst/>
@@ -7210,43 +7268,7 @@
                 <a:ea typeface="Microsoft YaHei"/>
                 <a:cs typeface="Microsoft YaHei"/>
               </a:rPr>
-              <a:t>金额缺失</a:t>
-            </a:r>
-          </a:p>
-        </p:txBody>
-      </p:sp>
-      <p:sp>
-        <p:nvSpPr>
-          <p:cNvPr id="50" name="TextBox 49"/>
-          <p:cNvSpPr txBox="1"/>
-          <p:nvPr/>
-        </p:nvSpPr>
-        <p:spPr>
-          <a:xfrm>
-            <a:off x="10104120" y="1517904"/>
-            <a:ext cx="1417320" cy="457200"/>
-          </a:xfrm>
-          <a:prstGeom prst="rect">
-            <a:avLst/>
-          </a:prstGeom>
-          <a:noFill/>
-        </p:spPr>
-        <p:txBody>
-          <a:bodyPr wrap="square" lIns="0" rIns="0" tIns="18288" bIns="18288" anchor="t">
-            <a:spAutoFit/>
-          </a:bodyPr>
-          <a:lstStyle/>
-          <a:p>
-            <a:r>
-              <a:rPr sz="2800" b="1">
-                <a:solidFill>
-                  <a:srgbClr val="1B2430"/>
-                </a:solidFill>
-                <a:latin typeface="Microsoft YaHei"/>
-                <a:ea typeface="Microsoft YaHei"/>
-                <a:cs typeface="Microsoft YaHei"/>
-              </a:rPr>
-              <a:t>0</a:t>
+              <a:t>Azure 缺失 · 2 页</a:t>
             </a:r>
           </a:p>
         </p:txBody>
@@ -7259,56 +7281,7 @@
         </p:nvSpPr>
         <p:spPr>
           <a:xfrm>
-            <a:off x="10104120" y="2011680"/>
-            <a:ext cx="1417320" cy="411480"/>
-          </a:xfrm>
-          <a:prstGeom prst="rect">
-            <a:avLst/>
-          </a:prstGeom>
-          <a:noFill/>
-        </p:spPr>
-        <p:txBody>
-          <a:bodyPr wrap="square" lIns="0" rIns="0" tIns="18288" bIns="18288" anchor="t">
-            <a:spAutoFit/>
-          </a:bodyPr>
-          <a:lstStyle/>
-          <a:p>
-            <a:r>
-              <a:rPr sz="950" b="0">
-                <a:solidFill>
-                  <a:srgbClr val="5B6675"/>
-                </a:solidFill>
-                <a:latin typeface="Microsoft YaHei"/>
-                <a:ea typeface="Microsoft YaHei"/>
-                <a:cs typeface="Microsoft YaHei"/>
-              </a:rPr>
-              <a:t>Azure 在配对 2 页上</a:t>
-            </a:r>
-          </a:p>
-          <a:p>
-            <a:r>
-              <a:rPr sz="950" b="0">
-                <a:solidFill>
-                  <a:srgbClr val="5B6675"/>
-                </a:solidFill>
-                <a:latin typeface="Microsoft YaHei"/>
-                <a:ea typeface="Microsoft YaHei"/>
-                <a:cs typeface="Microsoft YaHei"/>
-              </a:rPr>
-              <a:t>（全量扫描待跑）</a:t>
-            </a:r>
-          </a:p>
-        </p:txBody>
-      </p:sp>
-      <p:sp>
-        <p:nvSpPr>
-          <p:cNvPr id="52" name="TextBox 51"/>
-          <p:cNvSpPr txBox="1"/>
-          <p:nvPr/>
-        </p:nvSpPr>
-        <p:spPr>
-          <a:xfrm>
-            <a:off x="7178040" y="2468880"/>
+            <a:off x="7178040" y="2487168"/>
             <a:ext cx="4327855" cy="1097280"/>
           </a:xfrm>
           <a:prstGeom prst="rect">
@@ -7336,15 +7309,19 @@
                 <a:ea typeface="Microsoft YaHei"/>
                 <a:cs typeface="Microsoft YaHei"/>
               </a:rPr>
-              <a:t>• 三页的共同点：页首是上一页表格的续表</a:t>
-            </a:r>
-          </a:p>
-          <a:p>
-            <a:pPr>
-              <a:spcAft>
-                <a:spcPts val="200"/>
-              </a:spcAft>
-            </a:pPr>
+              <a:t>• </a:t>
+            </a:r>
+            <a:r>
+              <a:rPr sz="1050" b="1">
+                <a:solidFill>
+                  <a:srgbClr val="1B2430"/>
+                </a:solidFill>
+                <a:latin typeface="Microsoft YaHei"/>
+                <a:ea typeface="Microsoft YaHei"/>
+                <a:cs typeface="Microsoft YaHei"/>
+              </a:rPr>
+              <a:t>Infinity 已查实</a:t>
+            </a:r>
             <a:r>
               <a:rPr sz="1050" b="0">
                 <a:solidFill>
@@ -7354,7 +7331,7 @@
                 <a:ea typeface="Microsoft YaHei"/>
                 <a:cs typeface="Microsoft YaHei"/>
               </a:rPr>
-              <a:t>• 其中一页整张「分季度主要财务指标」表不见了，标题被挂到别的表上</a:t>
+              <a:t>：页首续表整段没输出；调用照常正常结束，重复 3 次缺的完全一样</a:t>
             </a:r>
           </a:p>
           <a:p>
@@ -7372,14 +7349,54 @@
                 <a:ea typeface="Microsoft YaHei"/>
                 <a:cs typeface="Microsoft YaHei"/>
               </a:rPr>
-              <a:t>• 调用照常「正常结束」，没有任何报错；重复调用 3 次，缺的完全一样</a:t>
-            </a:r>
-          </a:p>
-        </p:txBody>
-      </p:sp>
-      <p:sp>
-        <p:nvSpPr>
-          <p:cNvPr id="53" name="Rounded Rectangle 52"/>
+              <a:t>• 配对集外还有一页：</a:t>
+            </a:r>
+            <a:r>
+              <a:rPr sz="1050" b="1">
+                <a:solidFill>
+                  <a:srgbClr val="1B2430"/>
+                </a:solidFill>
+                <a:latin typeface="Microsoft YaHei"/>
+                <a:ea typeface="Microsoft YaHei"/>
+                <a:cs typeface="Microsoft YaHei"/>
+              </a:rPr>
+              <a:t>整张 16 个金额的表</a:t>
+            </a:r>
+            <a:r>
+              <a:rPr sz="1050" b="0">
+                <a:solidFill>
+                  <a:srgbClr val="1B2430"/>
+                </a:solidFill>
+                <a:latin typeface="Microsoft YaHei"/>
+                <a:ea typeface="Microsoft YaHei"/>
+                <a:cs typeface="Microsoft YaHei"/>
+              </a:rPr>
+              <a:t>不见了（Azure 该页网关失败）</a:t>
+            </a:r>
+          </a:p>
+          <a:p>
+            <a:pPr>
+              <a:spcAft>
+                <a:spcPts val="200"/>
+              </a:spcAft>
+            </a:pPr>
+            <a:r>
+              <a:rPr sz="1050" b="0">
+                <a:solidFill>
+                  <a:srgbClr val="1B2430"/>
+                </a:solidFill>
+                <a:latin typeface="Microsoft YaHei"/>
+                <a:ea typeface="Microsoft YaHei"/>
+                <a:cs typeface="Microsoft YaHei"/>
+              </a:rPr>
+              <a:t>• Azure 缺的 6 个原因待查（第三轮）；页级比较未观察到显著差异</a:t>
+            </a:r>
+          </a:p>
+        </p:txBody>
+      </p:sp>
+      <p:sp>
+        <p:nvSpPr>
+          <p:cNvPr id="52" name="Rounded Rectangle 51"/>
           <p:cNvSpPr/>
           <p:nvPr/>
         </p:nvSpPr>
@@ -7427,7 +7444,7 @@
       </p:sp>
       <p:sp>
         <p:nvSpPr>
-          <p:cNvPr id="54" name="TextBox 53"/>
+          <p:cNvPr id="53" name="TextBox 52"/>
           <p:cNvSpPr txBox="1"/>
           <p:nvPr/>
         </p:nvSpPr>
@@ -7474,7 +7491,7 @@
       </p:sp>
       <p:graphicFrame>
         <p:nvGraphicFramePr>
-          <p:cNvPr id="55" name="Table 54"/>
+          <p:cNvPr id="54" name="Table 53"/>
           <p:cNvGraphicFramePr>
             <a:graphicFrameLocks noGrp="1"/>
           </p:cNvGraphicFramePr>
@@ -8111,7 +8128,7 @@
       </p:graphicFrame>
       <p:sp>
         <p:nvSpPr>
-          <p:cNvPr id="56" name="TextBox 55"/>
+          <p:cNvPr id="55" name="TextBox 54"/>
           <p:cNvSpPr txBox="1"/>
           <p:nvPr/>
         </p:nvSpPr>
@@ -8340,7 +8357,7 @@
         </p:nvGraphicFramePr>
         <p:xfrm>
           <a:off x="502920" y="1188720"/>
-          <a:ext cx="6720840" cy="4727448"/>
+          <a:ext cx="6720840" cy="4828032"/>
         </p:xfrm>
         <a:graphic>
           <a:graphicData uri="http://schemas.openxmlformats.org/drawingml/2006/table">
@@ -8353,7 +8370,7 @@
                 <a:gridCol w="3246120"/>
                 <a:gridCol w="2331720"/>
               </a:tblGrid>
-              <a:tr h="429768">
+              <a:tr h="402336">
                 <a:tc>
                   <a:txBody>
                     <a:bodyPr wrap="square"/>
@@ -8475,7 +8492,7 @@
                   </a:tcPr>
                 </a:tc>
               </a:tr>
-              <a:tr h="429768">
+              <a:tr h="402336">
                 <a:tc>
                   <a:txBody>
                     <a:bodyPr wrap="square"/>
@@ -8597,7 +8614,7 @@
                   </a:tcPr>
                 </a:tc>
               </a:tr>
-              <a:tr h="429768">
+              <a:tr h="402336">
                 <a:tc>
                   <a:txBody>
                     <a:bodyPr wrap="square"/>
@@ -8719,7 +8736,7 @@
                   </a:tcPr>
                 </a:tc>
               </a:tr>
-              <a:tr h="429768">
+              <a:tr h="402336">
                 <a:tc>
                   <a:txBody>
                     <a:bodyPr wrap="square"/>
@@ -8841,7 +8858,7 @@
                   </a:tcPr>
                 </a:tc>
               </a:tr>
-              <a:tr h="429768">
+              <a:tr h="402336">
                 <a:tc>
                   <a:txBody>
                     <a:bodyPr wrap="square"/>
@@ -8963,7 +8980,7 @@
                   </a:tcPr>
                 </a:tc>
               </a:tr>
-              <a:tr h="429768">
+              <a:tr h="402336">
                 <a:tc>
                   <a:txBody>
                     <a:bodyPr wrap="square"/>
@@ -9085,7 +9102,129 @@
                   </a:tcPr>
                 </a:tc>
               </a:tr>
-              <a:tr h="429768">
+              <a:tr h="402336">
+                <a:tc>
+                  <a:txBody>
+                    <a:bodyPr wrap="square"/>
+                    <a:lstStyle/>
+                    <a:p>
+                      <a:r>
+                        <a:rPr sz="1100" b="0">
+                          <a:solidFill>
+                            <a:srgbClr val="1B2430"/>
+                          </a:solidFill>
+                          <a:latin typeface="Microsoft YaHei"/>
+                          <a:ea typeface="Microsoft YaHei"/>
+                          <a:cs typeface="Microsoft YaHei"/>
+                        </a:rPr>
+                        <a:t>标点</a:t>
+                      </a:r>
+                    </a:p>
+                  </a:txBody>
+                  <a:tcPr marL="73152" marR="73152" marT="36576" marB="36576" anchor="ctr">
+                    <a:solidFill>
+                      <a:srgbClr val="FFFFFF"/>
+                    </a:solidFill>
+                    <a:lnL w="0">
+                      <a:noFill/>
+                    </a:lnL>
+                    <a:lnR w="0">
+                      <a:noFill/>
+                    </a:lnR>
+                    <a:lnT w="9525">
+                      <a:solidFill>
+                        <a:srgbClr val="DDE3EA"/>
+                      </a:solidFill>
+                    </a:lnT>
+                    <a:lnB w="9525">
+                      <a:solidFill>
+                        <a:srgbClr val="DDE3EA"/>
+                      </a:solidFill>
+                    </a:lnB>
+                  </a:tcPr>
+                </a:tc>
+                <a:tc>
+                  <a:txBody>
+                    <a:bodyPr wrap="square"/>
+                    <a:lstStyle/>
+                    <a:p>
+                      <a:r>
+                        <a:rPr sz="1100" b="0">
+                          <a:solidFill>
+                            <a:srgbClr val="1B2430"/>
+                          </a:solidFill>
+                          <a:latin typeface="Microsoft YaHei"/>
+                          <a:ea typeface="Microsoft YaHei"/>
+                          <a:cs typeface="Microsoft YaHei"/>
+                        </a:rPr>
+                        <a:t>保留原文全角</a:t>
+                      </a:r>
+                    </a:p>
+                  </a:txBody>
+                  <a:tcPr marL="73152" marR="73152" marT="36576" marB="36576" anchor="ctr">
+                    <a:solidFill>
+                      <a:srgbClr val="FFFFFF"/>
+                    </a:solidFill>
+                    <a:lnL w="0">
+                      <a:noFill/>
+                    </a:lnL>
+                    <a:lnR w="0">
+                      <a:noFill/>
+                    </a:lnR>
+                    <a:lnT w="9525">
+                      <a:solidFill>
+                        <a:srgbClr val="DDE3EA"/>
+                      </a:solidFill>
+                    </a:lnT>
+                    <a:lnB w="9525">
+                      <a:solidFill>
+                        <a:srgbClr val="DDE3EA"/>
+                      </a:solidFill>
+                    </a:lnB>
+                  </a:tcPr>
+                </a:tc>
+                <a:tc>
+                  <a:txBody>
+                    <a:bodyPr wrap="square"/>
+                    <a:lstStyle/>
+                    <a:p>
+                      <a:r>
+                        <a:rPr sz="1100" b="0">
+                          <a:solidFill>
+                            <a:srgbClr val="1B2430"/>
+                          </a:solidFill>
+                          <a:latin typeface="Microsoft YaHei"/>
+                          <a:ea typeface="Microsoft YaHei"/>
+                          <a:cs typeface="Microsoft YaHei"/>
+                        </a:rPr>
+                        <a:t>全角转半角，下游需要归一化</a:t>
+                      </a:r>
+                    </a:p>
+                  </a:txBody>
+                  <a:tcPr marL="73152" marR="73152" marT="36576" marB="36576" anchor="ctr">
+                    <a:solidFill>
+                      <a:srgbClr val="FFFFFF"/>
+                    </a:solidFill>
+                    <a:lnL w="0">
+                      <a:noFill/>
+                    </a:lnL>
+                    <a:lnR w="0">
+                      <a:noFill/>
+                    </a:lnR>
+                    <a:lnT w="9525">
+                      <a:solidFill>
+                        <a:srgbClr val="DDE3EA"/>
+                      </a:solidFill>
+                    </a:lnT>
+                    <a:lnB w="9525">
+                      <a:solidFill>
+                        <a:srgbClr val="DDE3EA"/>
+                      </a:solidFill>
+                    </a:lnB>
+                  </a:tcPr>
+                </a:tc>
+              </a:tr>
+              <a:tr h="402336">
                 <a:tc>
                   <a:txBody>
                     <a:bodyPr wrap="square"/>
@@ -9207,7 +9346,7 @@
                   </a:tcPr>
                 </a:tc>
               </a:tr>
-              <a:tr h="429768">
+              <a:tr h="402336">
                 <a:tc>
                   <a:txBody>
                     <a:bodyPr wrap="square"/>
@@ -9329,7 +9468,7 @@
                   </a:tcPr>
                 </a:tc>
               </a:tr>
-              <a:tr h="429768">
+              <a:tr h="402336">
                 <a:tc>
                   <a:txBody>
                     <a:bodyPr wrap="square"/>
@@ -9451,7 +9590,7 @@
                   </a:tcPr>
                 </a:tc>
               </a:tr>
-              <a:tr h="429768">
+              <a:tr h="402336">
                 <a:tc>
                   <a:txBody>
                     <a:bodyPr wrap="square"/>
@@ -9573,7 +9712,7 @@
                   </a:tcPr>
                 </a:tc>
               </a:tr>
-              <a:tr h="429768">
+              <a:tr h="402336">
                 <a:tc>
                   <a:txBody>
                     <a:bodyPr wrap="square"/>
@@ -9708,7 +9847,7 @@
         <p:spPr>
           <a:xfrm>
             <a:off x="7543800" y="1188720"/>
-            <a:ext cx="4144975" cy="2487168"/>
+            <a:ext cx="4144975" cy="2926080"/>
           </a:xfrm>
           <a:prstGeom prst="roundRect">
             <a:avLst>
@@ -9791,8 +9930,8 @@
         </p:nvSpPr>
         <p:spPr>
           <a:xfrm>
-            <a:off x="7726679" y="1645920"/>
-            <a:ext cx="3779215" cy="2011680"/>
+            <a:off x="7726679" y="1600200"/>
+            <a:ext cx="3779215" cy="2468880"/>
           </a:xfrm>
           <a:prstGeom prst="rect">
             <a:avLst/>
@@ -9804,6 +9943,46 @@
             <a:spAutoFit/>
           </a:bodyPr>
           <a:lstStyle/>
+          <a:p>
+            <a:pPr>
+              <a:spcAft>
+                <a:spcPts val="500"/>
+              </a:spcAft>
+            </a:pPr>
+            <a:r>
+              <a:rPr sz="1150" b="0">
+                <a:solidFill>
+                  <a:srgbClr val="1B2430"/>
+                </a:solidFill>
+                <a:latin typeface="Microsoft YaHei"/>
+                <a:ea typeface="Microsoft YaHei"/>
+                <a:cs typeface="Microsoft YaHei"/>
+              </a:rPr>
+              <a:t>• </a:t>
+            </a:r>
+            <a:r>
+              <a:rPr sz="1150" b="1">
+                <a:solidFill>
+                  <a:srgbClr val="1B2430"/>
+                </a:solidFill>
+                <a:latin typeface="Microsoft YaHei"/>
+                <a:ea typeface="Microsoft YaHei"/>
+                <a:cs typeface="Microsoft YaHei"/>
+              </a:rPr>
+              <a:t>先决条件：有成本或私有化部署上的动因</a:t>
+            </a:r>
+            <a:r>
+              <a:rPr sz="1150" b="0">
+                <a:solidFill>
+                  <a:srgbClr val="1B2430"/>
+                </a:solidFill>
+                <a:latin typeface="Microsoft YaHei"/>
+                <a:ea typeface="Microsoft YaHei"/>
+                <a:cs typeface="Microsoft YaHei"/>
+              </a:rPr>
+              <a:t>，解析质量本身不构成动因</a:t>
+            </a:r>
+          </a:p>
           <a:p>
             <a:pPr>
               <a:spcAft>
@@ -9908,8 +10087,8 @@
         </p:nvSpPr>
         <p:spPr>
           <a:xfrm>
-            <a:off x="7543800" y="3813048"/>
-            <a:ext cx="4144975" cy="2487168"/>
+            <a:off x="7543800" y="4251960"/>
+            <a:ext cx="4144975" cy="2057400"/>
           </a:xfrm>
           <a:prstGeom prst="roundRect">
             <a:avLst>
@@ -9956,7 +10135,7 @@
         </p:nvSpPr>
         <p:spPr>
           <a:xfrm>
-            <a:off x="7726679" y="3904487"/>
+            <a:off x="7726679" y="4343400"/>
             <a:ext cx="3779215" cy="274320"/>
           </a:xfrm>
           <a:prstGeom prst="rect">
@@ -9992,8 +10171,8 @@
         </p:nvSpPr>
         <p:spPr>
           <a:xfrm>
-            <a:off x="7726679" y="4270248"/>
-            <a:ext cx="3779215" cy="2011680"/>
+            <a:off x="7726679" y="4681728"/>
+            <a:ext cx="3779215" cy="1600200"/>
           </a:xfrm>
           <a:prstGeom prst="rect">
             <a:avLst/>

--- a/docs/briefing-deck.pptx
+++ b/docs/briefing-deck.pptx
@@ -8,6 +8,7 @@
     <p:sldId id="256" r:id="rId7"/>
     <p:sldId id="257" r:id="rId8"/>
     <p:sldId id="258" r:id="rId9"/>
+    <p:sldId id="259" r:id="rId10"/>
   </p:sldIdLst>
   <p:sldSz cx="12191695" cy="6858000" type="screen4x3"/>
   <p:notesSz cx="6858000" cy="9144000"/>
@@ -3193,7 +3194,19 @@
                 <a:ea typeface="Microsoft YaHei"/>
                 <a:cs typeface="Microsoft YaHei"/>
               </a:rPr>
-              <a:t>样本：53 份公开披露文档 → 210 页 → 1,229 条断言；配对页 191 页（Azure 19 页因网关超时失败）</a:t>
+              <a:t>样本：53 份公开披露文档 → 210 页 → 1,229 条断言；配对页 191 页（Azure 19 页因网关超时失败）　·　出处：</a:t>
+            </a:r>
+            <a:r>
+              <a:rPr sz="900" b="0">
+                <a:solidFill>
+                  <a:srgbClr val="3D6FB6"/>
+                </a:solidFill>
+                <a:latin typeface="Microsoft YaHei"/>
+                <a:ea typeface="Microsoft YaHei"/>
+                <a:cs typeface="Microsoft YaHei"/>
+                <a:hlinkClick r:id="rId2"/>
+              </a:rPr>
+              <a:t>evaluation-report.md</a:t>
             </a:r>
           </a:p>
         </p:txBody>
@@ -3230,7 +3243,7 @@
                 <a:ea typeface="Microsoft YaHei"/>
                 <a:cs typeface="Microsoft YaHei"/>
               </a:rPr>
-              <a:t>1 / 3</a:t>
+              <a:t>1 / 4</a:t>
             </a:r>
           </a:p>
         </p:txBody>
@@ -5374,7 +5387,19 @@
                 <a:ea typeface="Microsoft YaHei"/>
                 <a:cs typeface="Microsoft YaHei"/>
               </a:rPr>
-              <a:t>检验方法：McNemar 配对检验；不合成总分；n &lt; 30 的分层不下结论</a:t>
+              <a:t>检验方法：McNemar 配对检验；不合成总分；n &lt; 30 的分层不下结论　·　出处：</a:t>
+            </a:r>
+            <a:r>
+              <a:rPr sz="900" b="0">
+                <a:solidFill>
+                  <a:srgbClr val="3D6FB6"/>
+                </a:solidFill>
+                <a:latin typeface="Microsoft YaHei"/>
+                <a:ea typeface="Microsoft YaHei"/>
+                <a:cs typeface="Microsoft YaHei"/>
+                <a:hlinkClick r:id="rId2"/>
+              </a:rPr>
+              <a:t>test-results.md</a:t>
             </a:r>
           </a:p>
         </p:txBody>
@@ -5411,7 +5436,7 @@
                 <a:ea typeface="Microsoft YaHei"/>
                 <a:cs typeface="Microsoft YaHei"/>
               </a:rPr>
-              <a:t>2 / 3</a:t>
+              <a:t>2 / 4</a:t>
             </a:r>
           </a:p>
         </p:txBody>
@@ -8305,7 +8330,19 @@
                 <a:ea typeface="Microsoft YaHei"/>
                 <a:cs typeface="Microsoft YaHei"/>
               </a:rPr>
-              <a:t>完整报告：docs/evaluation-report.md · 数据出处：docs/report-numbers-20260923.md</a:t>
+              <a:t>出处：</a:t>
+            </a:r>
+            <a:r>
+              <a:rPr sz="900" b="0">
+                <a:solidFill>
+                  <a:srgbClr val="3D6FB6"/>
+                </a:solidFill>
+                <a:latin typeface="Microsoft YaHei"/>
+                <a:ea typeface="Microsoft YaHei"/>
+                <a:cs typeface="Microsoft YaHei"/>
+                <a:hlinkClick r:id="rId2"/>
+              </a:rPr>
+              <a:t>evaluation-report.md</a:t>
             </a:r>
           </a:p>
         </p:txBody>
@@ -8342,7 +8379,7 @@
                 <a:ea typeface="Microsoft YaHei"/>
                 <a:cs typeface="Microsoft YaHei"/>
               </a:rPr>
-              <a:t>3 / 3</a:t>
+              <a:t>3 / 4</a:t>
             </a:r>
           </a:p>
         </p:txBody>
@@ -10254,6 +10291,932 @@
                 <a:cs typeface="Microsoft YaHei"/>
               </a:rPr>
               <a:t>• 生产吞吐达不到业务峰值；复读退化率超过阈值</a:t>
+            </a:r>
+          </a:p>
+        </p:txBody>
+      </p:sp>
+    </p:spTree>
+  </p:cSld>
+  <p:clrMapOvr>
+    <a:masterClrMapping/>
+  </p:clrMapOvr>
+</p:sld>
+</file>
+
+<file path=ppt/slides/slide4.xml><?xml version="1.0" encoding="utf-8"?>
+<p:sld xmlns:a="http://schemas.openxmlformats.org/drawingml/2006/main" xmlns:p="http://schemas.openxmlformats.org/presentationml/2006/main" xmlns:r="http://schemas.openxmlformats.org/officeDocument/2006/relationships">
+  <p:cSld>
+    <p:spTree>
+      <p:nvGrpSpPr>
+        <p:cNvPr id="1" name=""/>
+        <p:cNvGrpSpPr/>
+        <p:nvPr/>
+      </p:nvGrpSpPr>
+      <p:grpSpPr/>
+      <p:sp>
+        <p:nvSpPr>
+          <p:cNvPr id="2" name="TextBox 1"/>
+          <p:cNvSpPr txBox="1"/>
+          <p:nvPr/>
+        </p:nvSpPr>
+        <p:spPr>
+          <a:xfrm>
+            <a:off x="502920" y="292608"/>
+            <a:ext cx="11185855" cy="274320"/>
+          </a:xfrm>
+          <a:prstGeom prst="rect">
+            <a:avLst/>
+          </a:prstGeom>
+          <a:noFill/>
+        </p:spPr>
+        <p:txBody>
+          <a:bodyPr wrap="square" lIns="0" rIns="0" tIns="18288" bIns="18288" anchor="t">
+            <a:spAutoFit/>
+          </a:bodyPr>
+          <a:lstStyle/>
+          <a:p>
+            <a:r>
+              <a:rPr sz="1100" b="0">
+                <a:solidFill>
+                  <a:srgbClr val="5B6675"/>
+                </a:solidFill>
+                <a:latin typeface="Microsoft YaHei"/>
+                <a:ea typeface="Microsoft YaHei"/>
+                <a:cs typeface="Microsoft YaHei"/>
+              </a:rPr>
+              <a:t>评测总结</a:t>
+            </a:r>
+          </a:p>
+        </p:txBody>
+      </p:sp>
+      <p:sp>
+        <p:nvSpPr>
+          <p:cNvPr id="3" name="TextBox 2"/>
+          <p:cNvSpPr txBox="1"/>
+          <p:nvPr/>
+        </p:nvSpPr>
+        <p:spPr>
+          <a:xfrm>
+            <a:off x="502920" y="530352"/>
+            <a:ext cx="11185855" cy="548640"/>
+          </a:xfrm>
+          <a:prstGeom prst="rect">
+            <a:avLst/>
+          </a:prstGeom>
+          <a:noFill/>
+        </p:spPr>
+        <p:txBody>
+          <a:bodyPr wrap="square" lIns="0" rIns="0" tIns="18288" bIns="18288" anchor="t">
+            <a:spAutoFit/>
+          </a:bodyPr>
+          <a:lstStyle/>
+          <a:p>
+            <a:r>
+              <a:rPr sz="2600" b="1">
+                <a:solidFill>
+                  <a:srgbClr val="16324F"/>
+                </a:solidFill>
+                <a:latin typeface="Microsoft YaHei"/>
+                <a:ea typeface="Microsoft YaHei"/>
+                <a:cs typeface="Microsoft YaHei"/>
+              </a:rPr>
+              <a:t>评测总结：结论、方法与数据</a:t>
+            </a:r>
+          </a:p>
+        </p:txBody>
+      </p:sp>
+      <p:sp>
+        <p:nvSpPr>
+          <p:cNvPr id="4" name="TextBox 3"/>
+          <p:cNvSpPr txBox="1"/>
+          <p:nvPr/>
+        </p:nvSpPr>
+        <p:spPr>
+          <a:xfrm>
+            <a:off x="502920" y="6473952"/>
+            <a:ext cx="10271455" cy="274320"/>
+          </a:xfrm>
+          <a:prstGeom prst="rect">
+            <a:avLst/>
+          </a:prstGeom>
+          <a:noFill/>
+        </p:spPr>
+        <p:txBody>
+          <a:bodyPr wrap="square" lIns="0" rIns="0" tIns="18288" bIns="18288" anchor="t">
+            <a:spAutoFit/>
+          </a:bodyPr>
+          <a:lstStyle/>
+          <a:p>
+            <a:r>
+              <a:rPr sz="900" b="0">
+                <a:solidFill>
+                  <a:srgbClr val="5B6675"/>
+                </a:solidFill>
+                <a:latin typeface="Microsoft YaHei"/>
+                <a:ea typeface="Microsoft YaHei"/>
+                <a:cs typeface="Microsoft YaHei"/>
+              </a:rPr>
+              <a:t>出处：</a:t>
+            </a:r>
+            <a:r>
+              <a:rPr sz="900" b="0">
+                <a:solidFill>
+                  <a:srgbClr val="3D6FB6"/>
+                </a:solidFill>
+                <a:latin typeface="Microsoft YaHei"/>
+                <a:ea typeface="Microsoft YaHei"/>
+                <a:cs typeface="Microsoft YaHei"/>
+                <a:hlinkClick r:id="rId2"/>
+              </a:rPr>
+              <a:t>test-results.md</a:t>
+            </a:r>
+            <a:r>
+              <a:rPr sz="900" b="0">
+                <a:solidFill>
+                  <a:srgbClr val="5B6675"/>
+                </a:solidFill>
+                <a:latin typeface="Microsoft YaHei"/>
+                <a:ea typeface="Microsoft YaHei"/>
+                <a:cs typeface="Microsoft YaHei"/>
+              </a:rPr>
+              <a:t>　·　</a:t>
+            </a:r>
+            <a:r>
+              <a:rPr sz="900" b="0">
+                <a:solidFill>
+                  <a:srgbClr val="3D6FB6"/>
+                </a:solidFill>
+                <a:latin typeface="Microsoft YaHei"/>
+                <a:ea typeface="Microsoft YaHei"/>
+                <a:cs typeface="Microsoft YaHei"/>
+                <a:hlinkClick r:id="rId3"/>
+              </a:rPr>
+              <a:t>evaluation-report.md</a:t>
+            </a:r>
+          </a:p>
+        </p:txBody>
+      </p:sp>
+      <p:sp>
+        <p:nvSpPr>
+          <p:cNvPr id="5" name="TextBox 4"/>
+          <p:cNvSpPr txBox="1"/>
+          <p:nvPr/>
+        </p:nvSpPr>
+        <p:spPr>
+          <a:xfrm>
+            <a:off x="10774375" y="6473952"/>
+            <a:ext cx="914400" cy="274320"/>
+          </a:xfrm>
+          <a:prstGeom prst="rect">
+            <a:avLst/>
+          </a:prstGeom>
+          <a:noFill/>
+        </p:spPr>
+        <p:txBody>
+          <a:bodyPr wrap="square" lIns="0" rIns="0" tIns="18288" bIns="18288" anchor="t">
+            <a:spAutoFit/>
+          </a:bodyPr>
+          <a:lstStyle/>
+          <a:p>
+            <a:pPr algn="r"/>
+            <a:r>
+              <a:rPr sz="900" b="0">
+                <a:solidFill>
+                  <a:srgbClr val="5B6675"/>
+                </a:solidFill>
+                <a:latin typeface="Microsoft YaHei"/>
+                <a:ea typeface="Microsoft YaHei"/>
+                <a:cs typeface="Microsoft YaHei"/>
+              </a:rPr>
+              <a:t>4 / 4</a:t>
+            </a:r>
+          </a:p>
+        </p:txBody>
+      </p:sp>
+      <p:graphicFrame>
+        <p:nvGraphicFramePr>
+          <p:cNvPr id="6" name="Table 5"/>
+          <p:cNvGraphicFramePr>
+            <a:graphicFrameLocks noGrp="1"/>
+          </p:cNvGraphicFramePr>
+          <p:nvPr/>
+        </p:nvGraphicFramePr>
+        <p:xfrm>
+          <a:off x="502920" y="1188720"/>
+          <a:ext cx="11185855" cy="3154679"/>
+        </p:xfrm>
+        <a:graphic>
+          <a:graphicData uri="http://schemas.openxmlformats.org/drawingml/2006/table">
+            <a:tbl>
+              <a:tblPr firstRow="0" bandRow="0">
+                <a:tableStyleId>{5940675A-B579-460E-94D1-54222C63F5DA}</a:tableStyleId>
+              </a:tblPr>
+              <a:tblGrid>
+                <a:gridCol w="1188720"/>
+                <a:gridCol w="9997135"/>
+              </a:tblGrid>
+              <a:tr h="868680">
+                <a:tc>
+                  <a:txBody>
+                    <a:bodyPr wrap="square"/>
+                    <a:lstStyle/>
+                    <a:p>
+                      <a:r>
+                        <a:rPr sz="1300" b="1">
+                          <a:solidFill>
+                            <a:srgbClr val="16324F"/>
+                          </a:solidFill>
+                          <a:latin typeface="Microsoft YaHei"/>
+                          <a:ea typeface="Microsoft YaHei"/>
+                          <a:cs typeface="Microsoft YaHei"/>
+                        </a:rPr>
+                        <a:t>结论</a:t>
+                      </a:r>
+                    </a:p>
+                  </a:txBody>
+                  <a:tcPr marL="73152" marR="73152" marT="36576" marB="36576" anchor="ctr">
+                    <a:solidFill>
+                      <a:srgbClr val="F5F8FB"/>
+                    </a:solidFill>
+                    <a:lnL w="0">
+                      <a:noFill/>
+                    </a:lnL>
+                    <a:lnR w="0">
+                      <a:noFill/>
+                    </a:lnR>
+                    <a:lnT w="9525">
+                      <a:solidFill>
+                        <a:srgbClr val="DDE3EA"/>
+                      </a:solidFill>
+                    </a:lnT>
+                    <a:lnB w="9525">
+                      <a:solidFill>
+                        <a:srgbClr val="DDE3EA"/>
+                      </a:solidFill>
+                    </a:lnB>
+                  </a:tcPr>
+                </a:tc>
+                <a:tc>
+                  <a:txBody>
+                    <a:bodyPr wrap="square"/>
+                    <a:lstStyle/>
+                    <a:p>
+                      <a:r>
+                        <a:rPr sz="1300" b="0">
+                          <a:solidFill>
+                            <a:srgbClr val="1B2430"/>
+                          </a:solidFill>
+                          <a:latin typeface="Microsoft YaHei"/>
+                          <a:ea typeface="Microsoft YaHei"/>
+                          <a:cs typeface="Microsoft YaHei"/>
+                        </a:rPr>
+                        <a:t>Azure 在</a:t>
+                      </a:r>
+                      <a:r>
+                        <a:rPr sz="1300" b="1">
+                          <a:solidFill>
+                            <a:srgbClr val="1B2430"/>
+                          </a:solidFill>
+                          <a:latin typeface="Microsoft YaHei"/>
+                          <a:ea typeface="Microsoft YaHei"/>
+                          <a:cs typeface="Microsoft YaHei"/>
+                        </a:rPr>
+                        <a:t>金额</a:t>
+                      </a:r>
+                      <a:r>
+                        <a:rPr sz="1300" b="0">
+                          <a:solidFill>
+                            <a:srgbClr val="1B2430"/>
+                          </a:solidFill>
+                          <a:latin typeface="Microsoft YaHei"/>
+                          <a:ea typeface="Microsoft YaHei"/>
+                          <a:cs typeface="Microsoft YaHei"/>
+                        </a:rPr>
+                        <a:t>、</a:t>
+                      </a:r>
+                      <a:r>
+                        <a:rPr sz="1300" b="1">
+                          <a:solidFill>
+                            <a:srgbClr val="1B2430"/>
+                          </a:solidFill>
+                          <a:latin typeface="Microsoft YaHei"/>
+                          <a:ea typeface="Microsoft YaHei"/>
+                          <a:cs typeface="Microsoft YaHei"/>
+                        </a:rPr>
+                        <a:t>正文完整性</a:t>
+                      </a:r>
+                      <a:r>
+                        <a:rPr sz="1300" b="0">
+                          <a:solidFill>
+                            <a:srgbClr val="1B2430"/>
+                          </a:solidFill>
+                          <a:latin typeface="Microsoft YaHei"/>
+                          <a:ea typeface="Microsoft YaHei"/>
+                          <a:cs typeface="Microsoft YaHei"/>
+                        </a:rPr>
+                        <a:t>两项上显著更好，</a:t>
+                      </a:r>
+                      <a:r>
+                        <a:rPr sz="1300" b="1">
+                          <a:solidFill>
+                            <a:srgbClr val="1B2430"/>
+                          </a:solidFill>
+                          <a:latin typeface="Microsoft YaHei"/>
+                          <a:ea typeface="Microsoft YaHei"/>
+                          <a:cs typeface="Microsoft YaHei"/>
+                        </a:rPr>
+                        <a:t>单位币种</a:t>
+                      </a:r>
+                      <a:r>
+                        <a:rPr sz="1300" b="0">
+                          <a:solidFill>
+                            <a:srgbClr val="1B2430"/>
+                          </a:solidFill>
+                          <a:latin typeface="Microsoft YaHei"/>
+                          <a:ea typeface="Microsoft YaHei"/>
+                          <a:cs typeface="Microsoft YaHei"/>
+                        </a:rPr>
+                        <a:t>、</a:t>
+                      </a:r>
+                      <a:r>
+                        <a:rPr sz="1300" b="1">
+                          <a:solidFill>
+                            <a:srgbClr val="1B2430"/>
+                          </a:solidFill>
+                          <a:latin typeface="Microsoft YaHei"/>
+                          <a:ea typeface="Microsoft YaHei"/>
+                          <a:cs typeface="Microsoft YaHei"/>
+                        </a:rPr>
+                        <a:t>金额科目归属</a:t>
+                      </a:r>
+                      <a:r>
+                        <a:rPr sz="1300" b="0">
+                          <a:solidFill>
+                            <a:srgbClr val="1B2430"/>
+                          </a:solidFill>
+                          <a:latin typeface="Microsoft YaHei"/>
+                          <a:ea typeface="Microsoft YaHei"/>
+                          <a:cs typeface="Microsoft YaHei"/>
+                        </a:rPr>
+                        <a:t>两项差异不显著，没有一项 Infinity 更好。Infinity 另有两个结构性缺陷：</a:t>
+                      </a:r>
+                      <a:r>
+                        <a:rPr sz="1300" b="1">
+                          <a:solidFill>
+                            <a:srgbClr val="1B2430"/>
+                          </a:solidFill>
+                          <a:latin typeface="Microsoft YaHei"/>
+                          <a:ea typeface="Microsoft YaHei"/>
+                          <a:cs typeface="Microsoft YaHei"/>
+                        </a:rPr>
+                        <a:t>不返回置信度</a:t>
+                      </a:r>
+                      <a:r>
+                        <a:rPr sz="1300" b="0">
+                          <a:solidFill>
+                            <a:srgbClr val="1B2430"/>
+                          </a:solidFill>
+                          <a:latin typeface="Microsoft YaHei"/>
+                          <a:ea typeface="Microsoft YaHei"/>
+                          <a:cs typeface="Microsoft YaHei"/>
+                        </a:rPr>
+                        <a:t>；页首是续表的页会</a:t>
+                      </a:r>
+                      <a:r>
+                        <a:rPr sz="1300" b="1">
+                          <a:solidFill>
+                            <a:srgbClr val="1B2430"/>
+                          </a:solidFill>
+                          <a:latin typeface="Microsoft YaHei"/>
+                          <a:ea typeface="Microsoft YaHei"/>
+                          <a:cs typeface="Microsoft YaHei"/>
+                        </a:rPr>
+                        <a:t>静默丢表</a:t>
+                      </a:r>
+                      <a:r>
+                        <a:rPr sz="1300" b="0">
+                          <a:solidFill>
+                            <a:srgbClr val="1B2430"/>
+                          </a:solidFill>
+                          <a:latin typeface="Microsoft YaHei"/>
+                          <a:ea typeface="Microsoft YaHei"/>
+                          <a:cs typeface="Microsoft YaHei"/>
+                        </a:rPr>
+                        <a:t>。</a:t>
+                      </a:r>
+                    </a:p>
+                  </a:txBody>
+                  <a:tcPr marL="73152" marR="73152" marT="36576" marB="36576" anchor="ctr">
+                    <a:solidFill>
+                      <a:srgbClr val="FFFFFF"/>
+                    </a:solidFill>
+                    <a:lnL w="0">
+                      <a:noFill/>
+                    </a:lnL>
+                    <a:lnR w="0">
+                      <a:noFill/>
+                    </a:lnR>
+                    <a:lnT w="9525">
+                      <a:solidFill>
+                        <a:srgbClr val="DDE3EA"/>
+                      </a:solidFill>
+                    </a:lnT>
+                    <a:lnB w="9525">
+                      <a:solidFill>
+                        <a:srgbClr val="DDE3EA"/>
+                      </a:solidFill>
+                    </a:lnB>
+                  </a:tcPr>
+                </a:tc>
+              </a:tr>
+              <a:tr h="548640">
+                <a:tc>
+                  <a:txBody>
+                    <a:bodyPr wrap="square"/>
+                    <a:lstStyle/>
+                    <a:p>
+                      <a:r>
+                        <a:rPr sz="1300" b="1">
+                          <a:solidFill>
+                            <a:srgbClr val="16324F"/>
+                          </a:solidFill>
+                          <a:latin typeface="Microsoft YaHei"/>
+                          <a:ea typeface="Microsoft YaHei"/>
+                          <a:cs typeface="Microsoft YaHei"/>
+                        </a:rPr>
+                        <a:t>详细</a:t>
+                      </a:r>
+                    </a:p>
+                  </a:txBody>
+                  <a:tcPr marL="73152" marR="73152" marT="36576" marB="36576" anchor="ctr">
+                    <a:solidFill>
+                      <a:srgbClr val="F5F8FB"/>
+                    </a:solidFill>
+                    <a:lnL w="0">
+                      <a:noFill/>
+                    </a:lnL>
+                    <a:lnR w="0">
+                      <a:noFill/>
+                    </a:lnR>
+                    <a:lnT w="9525">
+                      <a:solidFill>
+                        <a:srgbClr val="DDE3EA"/>
+                      </a:solidFill>
+                    </a:lnT>
+                    <a:lnB w="9525">
+                      <a:solidFill>
+                        <a:srgbClr val="DDE3EA"/>
+                      </a:solidFill>
+                    </a:lnB>
+                  </a:tcPr>
+                </a:tc>
+                <a:tc>
+                  <a:txBody>
+                    <a:bodyPr wrap="square"/>
+                    <a:lstStyle/>
+                    <a:p>
+                      <a:r>
+                        <a:rPr sz="1300" b="0">
+                          <a:solidFill>
+                            <a:srgbClr val="1B2430"/>
+                          </a:solidFill>
+                          <a:latin typeface="Microsoft YaHei"/>
+                          <a:ea typeface="Microsoft YaHei"/>
+                          <a:cs typeface="Microsoft YaHei"/>
+                        </a:rPr>
+                        <a:t>各项指标见第 2 页；按文档类型的替代判断见第 1 页；模型差异、POC 范围与退出标准见第 3 页。</a:t>
+                      </a:r>
+                    </a:p>
+                  </a:txBody>
+                  <a:tcPr marL="73152" marR="73152" marT="36576" marB="36576" anchor="ctr">
+                    <a:solidFill>
+                      <a:srgbClr val="FFFFFF"/>
+                    </a:solidFill>
+                    <a:lnL w="0">
+                      <a:noFill/>
+                    </a:lnL>
+                    <a:lnR w="0">
+                      <a:noFill/>
+                    </a:lnR>
+                    <a:lnT w="9525">
+                      <a:solidFill>
+                        <a:srgbClr val="DDE3EA"/>
+                      </a:solidFill>
+                    </a:lnT>
+                    <a:lnB w="9525">
+                      <a:solidFill>
+                        <a:srgbClr val="DDE3EA"/>
+                      </a:solidFill>
+                    </a:lnB>
+                  </a:tcPr>
+                </a:tc>
+              </a:tr>
+              <a:tr h="868680">
+                <a:tc>
+                  <a:txBody>
+                    <a:bodyPr wrap="square"/>
+                    <a:lstStyle/>
+                    <a:p>
+                      <a:r>
+                        <a:rPr sz="1300" b="1">
+                          <a:solidFill>
+                            <a:srgbClr val="16324F"/>
+                          </a:solidFill>
+                          <a:latin typeface="Microsoft YaHei"/>
+                          <a:ea typeface="Microsoft YaHei"/>
+                          <a:cs typeface="Microsoft YaHei"/>
+                        </a:rPr>
+                        <a:t>方法</a:t>
+                      </a:r>
+                    </a:p>
+                  </a:txBody>
+                  <a:tcPr marL="73152" marR="73152" marT="36576" marB="36576" anchor="ctr">
+                    <a:solidFill>
+                      <a:srgbClr val="F5F8FB"/>
+                    </a:solidFill>
+                    <a:lnL w="0">
+                      <a:noFill/>
+                    </a:lnL>
+                    <a:lnR w="0">
+                      <a:noFill/>
+                    </a:lnR>
+                    <a:lnT w="9525">
+                      <a:solidFill>
+                        <a:srgbClr val="DDE3EA"/>
+                      </a:solidFill>
+                    </a:lnT>
+                    <a:lnB w="9525">
+                      <a:solidFill>
+                        <a:srgbClr val="DDE3EA"/>
+                      </a:solidFill>
+                    </a:lnB>
+                  </a:tcPr>
+                </a:tc>
+                <a:tc>
+                  <a:txBody>
+                    <a:bodyPr wrap="square"/>
+                    <a:lstStyle/>
+                    <a:p>
+                      <a:r>
+                        <a:rPr sz="1300" b="0">
+                          <a:solidFill>
+                            <a:srgbClr val="1B2430"/>
+                          </a:solidFill>
+                          <a:latin typeface="Microsoft YaHei"/>
+                          <a:ea typeface="Microsoft YaHei"/>
+                          <a:cs typeface="Microsoft YaHei"/>
+                        </a:rPr>
+                        <a:t>两边都通过调用 API 解析同一批页，各自输出 markdown，我方不做转换；输出与同一套 GT（断言）逐条比对，只比两边都成功的页，用配对检验判断差异是否显著，不合成总分。</a:t>
+                      </a:r>
+                    </a:p>
+                  </a:txBody>
+                  <a:tcPr marL="73152" marR="73152" marT="36576" marB="36576" anchor="ctr">
+                    <a:solidFill>
+                      <a:srgbClr val="FFFFFF"/>
+                    </a:solidFill>
+                    <a:lnL w="0">
+                      <a:noFill/>
+                    </a:lnL>
+                    <a:lnR w="0">
+                      <a:noFill/>
+                    </a:lnR>
+                    <a:lnT w="9525">
+                      <a:solidFill>
+                        <a:srgbClr val="DDE3EA"/>
+                      </a:solidFill>
+                    </a:lnT>
+                    <a:lnB w="9525">
+                      <a:solidFill>
+                        <a:srgbClr val="DDE3EA"/>
+                      </a:solidFill>
+                    </a:lnB>
+                  </a:tcPr>
+                </a:tc>
+              </a:tr>
+              <a:tr h="868680">
+                <a:tc>
+                  <a:txBody>
+                    <a:bodyPr wrap="square"/>
+                    <a:lstStyle/>
+                    <a:p>
+                      <a:r>
+                        <a:rPr sz="1300" b="1">
+                          <a:solidFill>
+                            <a:srgbClr val="16324F"/>
+                          </a:solidFill>
+                          <a:latin typeface="Microsoft YaHei"/>
+                          <a:ea typeface="Microsoft YaHei"/>
+                          <a:cs typeface="Microsoft YaHei"/>
+                        </a:rPr>
+                        <a:t>数据集</a:t>
+                      </a:r>
+                    </a:p>
+                  </a:txBody>
+                  <a:tcPr marL="73152" marR="73152" marT="36576" marB="36576" anchor="ctr">
+                    <a:solidFill>
+                      <a:srgbClr val="F5F8FB"/>
+                    </a:solidFill>
+                    <a:lnL w="0">
+                      <a:noFill/>
+                    </a:lnL>
+                    <a:lnR w="0">
+                      <a:noFill/>
+                    </a:lnR>
+                    <a:lnT w="9525">
+                      <a:solidFill>
+                        <a:srgbClr val="DDE3EA"/>
+                      </a:solidFill>
+                    </a:lnT>
+                    <a:lnB w="9525">
+                      <a:solidFill>
+                        <a:srgbClr val="DDE3EA"/>
+                      </a:solidFill>
+                    </a:lnB>
+                  </a:tcPr>
+                </a:tc>
+                <a:tc>
+                  <a:txBody>
+                    <a:bodyPr wrap="square"/>
+                    <a:lstStyle/>
+                    <a:p>
+                      <a:r>
+                        <a:rPr sz="1300" b="0">
+                          <a:solidFill>
+                            <a:srgbClr val="1B2430"/>
+                          </a:solidFill>
+                          <a:latin typeface="Microsoft YaHei"/>
+                          <a:ea typeface="Microsoft YaHei"/>
+                          <a:cs typeface="Microsoft YaHei"/>
+                        </a:rPr>
+                        <a:t>自建金融集：53 份公开披露文档（巨潮资讯网、HKEX 披露易）→ 210 页 → 1,229 条断言，配对 191 页。GT 以 PDF 文本层自动提取为主，76 条科目归属人工逐条确认。公共基准 olmOCR-Bench：跑了 41 页。</a:t>
+                      </a:r>
+                    </a:p>
+                  </a:txBody>
+                  <a:tcPr marL="73152" marR="73152" marT="36576" marB="36576" anchor="ctr">
+                    <a:solidFill>
+                      <a:srgbClr val="FFFFFF"/>
+                    </a:solidFill>
+                    <a:lnL w="0">
+                      <a:noFill/>
+                    </a:lnL>
+                    <a:lnR w="0">
+                      <a:noFill/>
+                    </a:lnR>
+                    <a:lnT w="9525">
+                      <a:solidFill>
+                        <a:srgbClr val="DDE3EA"/>
+                      </a:solidFill>
+                    </a:lnT>
+                    <a:lnB w="9525">
+                      <a:solidFill>
+                        <a:srgbClr val="DDE3EA"/>
+                      </a:solidFill>
+                    </a:lnB>
+                  </a:tcPr>
+                </a:tc>
+              </a:tr>
+            </a:tbl>
+          </a:graphicData>
+        </a:graphic>
+      </p:graphicFrame>
+      <p:sp>
+        <p:nvSpPr>
+          <p:cNvPr id="7" name="Rounded Rectangle 6"/>
+          <p:cNvSpPr/>
+          <p:nvPr/>
+        </p:nvSpPr>
+        <p:spPr>
+          <a:xfrm>
+            <a:off x="502920" y="4754880"/>
+            <a:ext cx="5501487" cy="1005840"/>
+          </a:xfrm>
+          <a:prstGeom prst="roundRect">
+            <a:avLst>
+              <a:gd name="adj" fmla="val 4000"/>
+            </a:avLst>
+          </a:prstGeom>
+          <a:solidFill>
+            <a:srgbClr val="FFFFFF"/>
+          </a:solidFill>
+          <a:ln w="9525">
+            <a:solidFill>
+              <a:srgbClr val="DDE3EA"/>
+            </a:solidFill>
+          </a:ln>
+          <a:effectLst/>
+        </p:spPr>
+        <p:style>
+          <a:lnRef idx="1">
+            <a:schemeClr val="accent1"/>
+          </a:lnRef>
+          <a:fillRef idx="3">
+            <a:schemeClr val="accent1"/>
+          </a:fillRef>
+          <a:effectRef idx="2">
+            <a:schemeClr val="accent1"/>
+          </a:effectRef>
+          <a:fontRef idx="minor">
+            <a:schemeClr val="lt1"/>
+          </a:fontRef>
+        </p:style>
+        <p:txBody>
+          <a:bodyPr rtlCol="0" anchor="ctr"/>
+          <a:lstStyle/>
+          <a:p>
+            <a:pPr algn="ctr"/>
+          </a:p>
+        </p:txBody>
+      </p:sp>
+      <p:sp>
+        <p:nvSpPr>
+          <p:cNvPr id="8" name="TextBox 7"/>
+          <p:cNvSpPr txBox="1"/>
+          <p:nvPr/>
+        </p:nvSpPr>
+        <p:spPr>
+          <a:xfrm>
+            <a:off x="685800" y="4846320"/>
+            <a:ext cx="5135727" cy="274320"/>
+          </a:xfrm>
+          <a:prstGeom prst="rect">
+            <a:avLst/>
+          </a:prstGeom>
+          <a:noFill/>
+        </p:spPr>
+        <p:txBody>
+          <a:bodyPr wrap="square" lIns="0" rIns="0" tIns="18288" bIns="18288" anchor="t">
+            <a:spAutoFit/>
+          </a:bodyPr>
+          <a:lstStyle/>
+          <a:p>
+            <a:r>
+              <a:rPr sz="1300" b="1">
+                <a:solidFill>
+                  <a:srgbClr val="3D6FB6"/>
+                </a:solidFill>
+                <a:latin typeface="Microsoft YaHei"/>
+                <a:ea typeface="Microsoft YaHei"/>
+                <a:cs typeface="Microsoft YaHei"/>
+                <a:hlinkClick r:id="rId2"/>
+              </a:rPr>
+              <a:t>test-results.md</a:t>
+            </a:r>
+          </a:p>
+        </p:txBody>
+      </p:sp>
+      <p:sp>
+        <p:nvSpPr>
+          <p:cNvPr id="9" name="TextBox 8"/>
+          <p:cNvSpPr txBox="1"/>
+          <p:nvPr/>
+        </p:nvSpPr>
+        <p:spPr>
+          <a:xfrm>
+            <a:off x="685800" y="5193792"/>
+            <a:ext cx="5135727" cy="502920"/>
+          </a:xfrm>
+          <a:prstGeom prst="rect">
+            <a:avLst/>
+          </a:prstGeom>
+          <a:noFill/>
+        </p:spPr>
+        <p:txBody>
+          <a:bodyPr wrap="square" lIns="0" rIns="0" tIns="18288" bIns="18288" anchor="t">
+            <a:spAutoFit/>
+          </a:bodyPr>
+          <a:lstStyle/>
+          <a:p>
+            <a:r>
+              <a:rPr sz="1050" b="0">
+                <a:solidFill>
+                  <a:srgbClr val="5B6675"/>
+                </a:solidFill>
+                <a:latin typeface="Microsoft YaHei"/>
+                <a:ea typeface="Microsoft YaHei"/>
+                <a:cs typeface="Microsoft YaHei"/>
+              </a:rPr>
+              <a:t>测试集与测试结果：测试集构成、GT 来源、各项指标与逐条失败明细、服务数据、数字出处</a:t>
+            </a:r>
+          </a:p>
+        </p:txBody>
+      </p:sp>
+      <p:sp>
+        <p:nvSpPr>
+          <p:cNvPr id="10" name="Rounded Rectangle 9"/>
+          <p:cNvSpPr/>
+          <p:nvPr/>
+        </p:nvSpPr>
+        <p:spPr>
+          <a:xfrm>
+            <a:off x="6187287" y="4754880"/>
+            <a:ext cx="5501487" cy="1005840"/>
+          </a:xfrm>
+          <a:prstGeom prst="roundRect">
+            <a:avLst>
+              <a:gd name="adj" fmla="val 4000"/>
+            </a:avLst>
+          </a:prstGeom>
+          <a:solidFill>
+            <a:srgbClr val="FFFFFF"/>
+          </a:solidFill>
+          <a:ln w="9525">
+            <a:solidFill>
+              <a:srgbClr val="DDE3EA"/>
+            </a:solidFill>
+          </a:ln>
+          <a:effectLst/>
+        </p:spPr>
+        <p:style>
+          <a:lnRef idx="1">
+            <a:schemeClr val="accent1"/>
+          </a:lnRef>
+          <a:fillRef idx="3">
+            <a:schemeClr val="accent1"/>
+          </a:fillRef>
+          <a:effectRef idx="2">
+            <a:schemeClr val="accent1"/>
+          </a:effectRef>
+          <a:fontRef idx="minor">
+            <a:schemeClr val="lt1"/>
+          </a:fontRef>
+        </p:style>
+        <p:txBody>
+          <a:bodyPr rtlCol="0" anchor="ctr"/>
+          <a:lstStyle/>
+          <a:p>
+            <a:pPr algn="ctr"/>
+          </a:p>
+        </p:txBody>
+      </p:sp>
+      <p:sp>
+        <p:nvSpPr>
+          <p:cNvPr id="11" name="TextBox 10"/>
+          <p:cNvSpPr txBox="1"/>
+          <p:nvPr/>
+        </p:nvSpPr>
+        <p:spPr>
+          <a:xfrm>
+            <a:off x="6370167" y="4846320"/>
+            <a:ext cx="5135727" cy="274320"/>
+          </a:xfrm>
+          <a:prstGeom prst="rect">
+            <a:avLst/>
+          </a:prstGeom>
+          <a:noFill/>
+        </p:spPr>
+        <p:txBody>
+          <a:bodyPr wrap="square" lIns="0" rIns="0" tIns="18288" bIns="18288" anchor="t">
+            <a:spAutoFit/>
+          </a:bodyPr>
+          <a:lstStyle/>
+          <a:p>
+            <a:r>
+              <a:rPr sz="1300" b="1">
+                <a:solidFill>
+                  <a:srgbClr val="3D6FB6"/>
+                </a:solidFill>
+                <a:latin typeface="Microsoft YaHei"/>
+                <a:ea typeface="Microsoft YaHei"/>
+                <a:cs typeface="Microsoft YaHei"/>
+                <a:hlinkClick r:id="rId3"/>
+              </a:rPr>
+              <a:t>evaluation-report.md</a:t>
+            </a:r>
+          </a:p>
+        </p:txBody>
+      </p:sp>
+      <p:sp>
+        <p:nvSpPr>
+          <p:cNvPr id="12" name="TextBox 11"/>
+          <p:cNvSpPr txBox="1"/>
+          <p:nvPr/>
+        </p:nvSpPr>
+        <p:spPr>
+          <a:xfrm>
+            <a:off x="6370167" y="5193792"/>
+            <a:ext cx="5135727" cy="502920"/>
+          </a:xfrm>
+          <a:prstGeom prst="rect">
+            <a:avLst/>
+          </a:prstGeom>
+          <a:noFill/>
+        </p:spPr>
+        <p:txBody>
+          <a:bodyPr wrap="square" lIns="0" rIns="0" tIns="18288" bIns="18288" anchor="t">
+            <a:spAutoFit/>
+          </a:bodyPr>
+          <a:lstStyle/>
+          <a:p>
+            <a:r>
+              <a:rPr sz="1050" b="0">
+                <a:solidFill>
+                  <a:srgbClr val="5B6675"/>
+                </a:solidFill>
+                <a:latin typeface="Microsoft YaHei"/>
+                <a:ea typeface="Microsoft YaHei"/>
+                <a:cs typeface="Microsoft YaHei"/>
+              </a:rPr>
+              <a:t>分析报告：结论与依据、按文档类型的判断、结构性差异、POC 范围与退出标准、评测方法（附录 C）</a:t>
             </a:r>
           </a:p>
         </p:txBody>

--- a/docs/briefing-deck.pptx
+++ b/docs/briefing-deck.pptx
@@ -3158,7 +3158,7 @@
                 <a:ea typeface="Microsoft YaHei"/>
                 <a:cs typeface="Microsoft YaHei"/>
               </a:rPr>
-              <a:t>哪些文档能交给 Infinity-Parser2，哪些不能</a:t>
+              <a:t>文档类型适用性评估：Infinity-Parser2 替代 Azure DI 的范围</a:t>
             </a:r>
           </a:p>
         </p:txBody>
@@ -5315,7 +5315,7 @@
                 <a:ea typeface="Microsoft YaHei"/>
                 <a:cs typeface="Microsoft YaHei"/>
               </a:rPr>
-              <a:t>PDF 处理效果 · 同一批 191 页、同一套断言配对比较</a:t>
+              <a:t>统一标点后，Azure 在各项指标上持平或更好 · 同一批 191 页、同一套断言配对比较</a:t>
             </a:r>
           </a:p>
         </p:txBody>
@@ -5351,7 +5351,7 @@
                 <a:ea typeface="Microsoft YaHei"/>
                 <a:cs typeface="Microsoft YaHei"/>
               </a:rPr>
-              <a:t>统一标点后，Azure 在各项指标上持平或更好</a:t>
+              <a:t>解析质量对比：Azure DI vs Infinity-Parser2</a:t>
             </a:r>
           </a:p>
         </p:txBody>
@@ -8258,7 +8258,7 @@
                 <a:ea typeface="Microsoft YaHei"/>
                 <a:cs typeface="Microsoft YaHei"/>
               </a:rPr>
-              <a:t>模型基本对比 · 下一步</a:t>
+              <a:t>OCR 出错时会报不确定，VLM 出错时照常交付 · 下一步：POC 范围与退出标准</a:t>
             </a:r>
           </a:p>
         </p:txBody>
@@ -8294,7 +8294,7 @@
                 <a:ea typeface="Microsoft YaHei"/>
                 <a:cs typeface="Microsoft YaHei"/>
               </a:rPr>
-              <a:t>两类技术出错的方式不同：OCR 会「报不确定」，VLM 会「照常交付」</a:t>
+              <a:t>技术路线对比：Azure DI（OCR 流水线）vs Infinity-Parser2（VLM）</a:t>
             </a:r>
           </a:p>
         </p:txBody>
@@ -10344,7 +10344,7 @@
                 <a:ea typeface="Microsoft YaHei"/>
                 <a:cs typeface="Microsoft YaHei"/>
               </a:rPr>
-              <a:t>评测总结</a:t>
+              <a:t>结论 · 详细 · 方法 · 数据集</a:t>
             </a:r>
           </a:p>
         </p:txBody>
@@ -10380,7 +10380,7 @@
                 <a:ea typeface="Microsoft YaHei"/>
                 <a:cs typeface="Microsoft YaHei"/>
               </a:rPr>
-              <a:t>评测总结：结论、方法与数据</a:t>
+              <a:t>评测总结</a:t>
             </a:r>
           </a:p>
         </p:txBody>

--- a/docs/briefing-deck.pptx
+++ b/docs/briefing-deck.pptx
@@ -3367,29 +3367,7 @@
                 <a:ea typeface="Microsoft YaHei"/>
                 <a:cs typeface="Microsoft YaHei"/>
               </a:rPr>
-              <a:t>一句话：</a:t>
-            </a:r>
-            <a:r>
-              <a:rPr sz="1300" b="0">
-                <a:solidFill>
-                  <a:srgbClr val="1B2430"/>
-                </a:solidFill>
-                <a:latin typeface="Microsoft YaHei"/>
-                <a:ea typeface="Microsoft YaHei"/>
-                <a:cs typeface="Microsoft YaHei"/>
-              </a:rPr>
-              <a:t>统一标点后，</a:t>
-            </a:r>
-            <a:r>
-              <a:rPr sz="1300" b="1">
-                <a:solidFill>
-                  <a:srgbClr val="1B2430"/>
-                </a:solidFill>
-                <a:latin typeface="Microsoft YaHei"/>
-                <a:ea typeface="Microsoft YaHei"/>
-                <a:cs typeface="Microsoft YaHei"/>
-              </a:rPr>
-              <a:t>解析质量上 Azure 每项都持平或更好</a:t>
+              <a:t>一句话：解析质量上 Azure 每项都持平或更好</a:t>
             </a:r>
             <a:r>
               <a:rPr sz="1300" b="0">
@@ -5315,7 +5293,7 @@
                 <a:ea typeface="Microsoft YaHei"/>
                 <a:cs typeface="Microsoft YaHei"/>
               </a:rPr>
-              <a:t>统一标点后，Azure 在各项指标上持平或更好 · 同一批 191 页、同一套断言配对比较</a:t>
+              <a:t>Azure 在各项指标上持平或更好 · 同一批 191 页、同一套断言配对比较</a:t>
             </a:r>
           </a:p>
         </p:txBody>
@@ -6189,7 +6167,7 @@
                 <a:ea typeface="Microsoft YaHei"/>
                 <a:cs typeface="Microsoft YaHei"/>
               </a:rPr>
-              <a:t>正文完整性（统一标点后）</a:t>
+              <a:t>正文完整性</a:t>
             </a:r>
             <a:r>
               <a:rPr sz="1150" b="0">
@@ -6662,7 +6640,7 @@
                 <a:ea typeface="Microsoft YaHei"/>
                 <a:cs typeface="Microsoft YaHei"/>
               </a:rPr>
-              <a:t>单位与币种（统一标点后）</a:t>
+              <a:t>单位与币种</a:t>
             </a:r>
             <a:r>
               <a:rPr sz="1150" b="0">

--- a/docs/briefing-deck.pptx
+++ b/docs/briefing-deck.pptx
@@ -3158,7 +3158,7 @@
                 <a:ea typeface="Microsoft YaHei"/>
                 <a:cs typeface="Microsoft YaHei"/>
               </a:rPr>
-              <a:t>文档类型适用性评估：Infinity-Parser2 替代 Azure DI 的范围</a:t>
+              <a:t>文档类型适用性对比：Azure DI vs Infinity-Parser2</a:t>
             </a:r>
           </a:p>
         </p:txBody>
@@ -10762,7 +10762,7 @@
                           <a:ea typeface="Microsoft YaHei"/>
                           <a:cs typeface="Microsoft YaHei"/>
                         </a:rPr>
-                        <a:t>各项指标见第 2 页；按文档类型的替代判断见第 1 页；模型差异、POC 范围与退出标准见第 3 页。</a:t>
+                        <a:t>测试结果数据：参考 test-results.md；分析报告查询信息：参考 evaluation-report.md</a:t>
                       </a:r>
                     </a:p>
                   </a:txBody>

--- a/docs/briefing-deck.pptx
+++ b/docs/briefing-deck.pptx
@@ -8058,7 +8058,7 @@
                           <a:ea typeface="Microsoft YaHei"/>
                           <a:cs typeface="Microsoft YaHei"/>
                         </a:rPr>
-                        <a:t>未报价</a:t>
+                        <a:t>Flash ¥38 / 千页（5 折 ¥19）</a:t>
                       </a:r>
                     </a:p>
                   </a:txBody>
@@ -8160,7 +8160,7 @@
                 <a:ea typeface="Microsoft YaHei"/>
                 <a:cs typeface="Microsoft YaHei"/>
               </a:rPr>
-              <a:t>每页约 9.6k token。若按 token 计费，输入单价要低于 </a:t>
+              <a:t>被测档位据厂商答复为 Flash 2.1，按 09-28 报价单牌价约 $5.3 / 千页，</a:t>
             </a:r>
             <a:r>
               <a:rPr sz="1000" b="1">
@@ -8171,7 +8171,7 @@
                 <a:ea typeface="Microsoft YaHei"/>
                 <a:cs typeface="Microsoft YaHei"/>
               </a:rPr>
-              <a:t>≈ $1.13 / 百万 token</a:t>
+              <a:t>约为 Azure 牌价的一半</a:t>
             </a:r>
             <a:r>
               <a:rPr sz="1000" b="0">
@@ -8182,7 +8182,7 @@
                 <a:ea typeface="Microsoft YaHei"/>
                 <a:cs typeface="Microsoft YaHei"/>
               </a:rPr>
-              <a:t> 才能与 Azure 牌价持平。</a:t>
+              <a:t>；计量单位、折扣含义待确认，技术服务费另计。</a:t>
             </a:r>
           </a:p>
         </p:txBody>
@@ -9660,7 +9660,7 @@
                           <a:ea typeface="Microsoft YaHei"/>
                           <a:cs typeface="Microsoft YaHei"/>
                         </a:rPr>
-                        <a:t>只看得到别名 inf-mllm，型号与版本不可知</a:t>
+                        <a:t>只看得到别名 inf-mllm；厂商答复为 Flash 2.1，无法逐次核实</a:t>
                       </a:r>
                     </a:p>
                   </a:txBody>
@@ -10481,7 +10481,7 @@
         </p:nvGraphicFramePr>
         <p:xfrm>
           <a:off x="502920" y="1188720"/>
-          <a:ext cx="11185855" cy="3154679"/>
+          <a:ext cx="11185855" cy="3154680"/>
         </p:xfrm>
         <a:graphic>
           <a:graphicData uri="http://schemas.openxmlformats.org/drawingml/2006/table">
